--- a/presentations/for_engineers/PythoNN/Q_PythoNN.pptx
+++ b/presentations/for_engineers/PythoNN/Q_PythoNN.pptx
@@ -272,7 +272,7 @@
               <a:rPr lang="ru-RU" smtClean="0">
                 <a:latin typeface="Arial" panose="020B0604020202020204" pitchFamily="34" charset="0"/>
               </a:rPr>
-              <a:t>22.11.2024</a:t>
+              <a:t>02.10.2026</a:t>
             </a:fld>
             <a:endParaRPr lang="ru-RU" dirty="0">
               <a:latin typeface="Arial" panose="020B0604020202020204" pitchFamily="34" charset="0"/>
@@ -473,7 +473,7 @@
           <a:p>
             <a:fld id="{CB575C7B-338A-8242-908B-E43D2F6D6AE5}" type="datetimeFigureOut">
               <a:rPr lang="ru-RU" smtClean="0"/>
-              <a:t>22.11.2024</a:t>
+              <a:t>28.09.2026</a:t>
             </a:fld>
             <a:endParaRPr lang="ru-RU"/>
           </a:p>
@@ -31997,14 +31997,14 @@
             <a:avLst/>
           </a:prstGeom>
           <a:blipFill dpi="0" rotWithShape="1">
-            <a:blip r:embed="rId13" cstate="print">
+            <a:blip cstate="print">
               <a:alphaModFix amt="40000"/>
               <a:extLst>
                 <a:ext uri="{28A0092B-C50C-407E-A947-70E740481C1C}">
                   <a14:useLocalDpi xmlns:a14="http://schemas.microsoft.com/office/drawing/2010/main"/>
                 </a:ext>
                 <a:ext uri="{96DAC541-7B7A-43D3-8B79-37D633B846F1}">
-                  <asvg:svgBlip xmlns:asvg="http://schemas.microsoft.com/office/drawing/2016/SVG/main" r:embed="rId14"/>
+                  <asvg:svgBlip xmlns:asvg="http://schemas.microsoft.com/office/drawing/2016/SVG/main" r:embed="rId13"/>
                 </a:ext>
               </a:extLst>
             </a:blip>
@@ -32092,14 +32092,14 @@
             <a:avLst/>
           </a:prstGeom>
           <a:blipFill dpi="0" rotWithShape="1">
-            <a:blip r:embed="rId13" cstate="print">
+            <a:blip cstate="print">
               <a:alphaModFix amt="40000"/>
               <a:extLst>
                 <a:ext uri="{28A0092B-C50C-407E-A947-70E740481C1C}">
                   <a14:useLocalDpi xmlns:a14="http://schemas.microsoft.com/office/drawing/2010/main"/>
                 </a:ext>
                 <a:ext uri="{96DAC541-7B7A-43D3-8B79-37D633B846F1}">
-                  <asvg:svgBlip xmlns:asvg="http://schemas.microsoft.com/office/drawing/2016/SVG/main" r:embed="rId14"/>
+                  <asvg:svgBlip xmlns:asvg="http://schemas.microsoft.com/office/drawing/2016/SVG/main" r:embed="rId13"/>
                 </a:ext>
               </a:extLst>
             </a:blip>
@@ -33075,14 +33075,14 @@
             <a:avLst/>
           </a:prstGeom>
           <a:blipFill dpi="0" rotWithShape="1">
-            <a:blip r:embed="rId10" cstate="print">
+            <a:blip cstate="print">
               <a:alphaModFix amt="40000"/>
               <a:extLst>
                 <a:ext uri="{28A0092B-C50C-407E-A947-70E740481C1C}">
                   <a14:useLocalDpi xmlns:a14="http://schemas.microsoft.com/office/drawing/2010/main"/>
                 </a:ext>
                 <a:ext uri="{96DAC541-7B7A-43D3-8B79-37D633B846F1}">
-                  <asvg:svgBlip xmlns:asvg="http://schemas.microsoft.com/office/drawing/2016/SVG/main" r:embed="rId11"/>
+                  <asvg:svgBlip xmlns:asvg="http://schemas.microsoft.com/office/drawing/2016/SVG/main" r:embed="rId10"/>
                 </a:ext>
               </a:extLst>
             </a:blip>
@@ -33170,14 +33170,14 @@
             <a:avLst/>
           </a:prstGeom>
           <a:blipFill dpi="0" rotWithShape="1">
-            <a:blip r:embed="rId10" cstate="print">
+            <a:blip cstate="print">
               <a:alphaModFix amt="40000"/>
               <a:extLst>
                 <a:ext uri="{28A0092B-C50C-407E-A947-70E740481C1C}">
                   <a14:useLocalDpi xmlns:a14="http://schemas.microsoft.com/office/drawing/2010/main"/>
                 </a:ext>
                 <a:ext uri="{96DAC541-7B7A-43D3-8B79-37D633B846F1}">
-                  <asvg:svgBlip xmlns:asvg="http://schemas.microsoft.com/office/drawing/2016/SVG/main" r:embed="rId11"/>
+                  <asvg:svgBlip xmlns:asvg="http://schemas.microsoft.com/office/drawing/2016/SVG/main" r:embed="rId10"/>
                 </a:ext>
               </a:extLst>
             </a:blip>
@@ -34150,14 +34150,14 @@
             <a:avLst/>
           </a:prstGeom>
           <a:blipFill dpi="0" rotWithShape="1">
-            <a:blip r:embed="rId23" cstate="print">
+            <a:blip cstate="print">
               <a:alphaModFix amt="40000"/>
               <a:extLst>
                 <a:ext uri="{28A0092B-C50C-407E-A947-70E740481C1C}">
                   <a14:useLocalDpi xmlns:a14="http://schemas.microsoft.com/office/drawing/2010/main"/>
                 </a:ext>
                 <a:ext uri="{96DAC541-7B7A-43D3-8B79-37D633B846F1}">
-                  <asvg:svgBlip xmlns:asvg="http://schemas.microsoft.com/office/drawing/2016/SVG/main" r:embed="rId24"/>
+                  <asvg:svgBlip xmlns:asvg="http://schemas.microsoft.com/office/drawing/2016/SVG/main" r:embed="rId23"/>
                 </a:ext>
               </a:extLst>
             </a:blip>
@@ -34245,14 +34245,14 @@
             <a:avLst/>
           </a:prstGeom>
           <a:blipFill dpi="0" rotWithShape="1">
-            <a:blip r:embed="rId23" cstate="print">
+            <a:blip cstate="print">
               <a:alphaModFix amt="40000"/>
               <a:extLst>
                 <a:ext uri="{28A0092B-C50C-407E-A947-70E740481C1C}">
                   <a14:useLocalDpi xmlns:a14="http://schemas.microsoft.com/office/drawing/2010/main"/>
                 </a:ext>
                 <a:ext uri="{96DAC541-7B7A-43D3-8B79-37D633B846F1}">
-                  <asvg:svgBlip xmlns:asvg="http://schemas.microsoft.com/office/drawing/2016/SVG/main" r:embed="rId24"/>
+                  <asvg:svgBlip xmlns:asvg="http://schemas.microsoft.com/office/drawing/2016/SVG/main" r:embed="rId23"/>
                 </a:ext>
               </a:extLst>
             </a:blip>
@@ -35358,14 +35358,14 @@
             <a:avLst/>
           </a:prstGeom>
           <a:blipFill dpi="0" rotWithShape="1">
-            <a:blip r:embed="rId10" cstate="print">
+            <a:blip cstate="print">
               <a:alphaModFix amt="40000"/>
               <a:extLst>
                 <a:ext uri="{28A0092B-C50C-407E-A947-70E740481C1C}">
                   <a14:useLocalDpi xmlns:a14="http://schemas.microsoft.com/office/drawing/2010/main"/>
                 </a:ext>
                 <a:ext uri="{96DAC541-7B7A-43D3-8B79-37D633B846F1}">
-                  <asvg:svgBlip xmlns:asvg="http://schemas.microsoft.com/office/drawing/2016/SVG/main" r:embed="rId11"/>
+                  <asvg:svgBlip xmlns:asvg="http://schemas.microsoft.com/office/drawing/2016/SVG/main" r:embed="rId10"/>
                 </a:ext>
               </a:extLst>
             </a:blip>
@@ -35453,14 +35453,14 @@
             <a:avLst/>
           </a:prstGeom>
           <a:blipFill dpi="0" rotWithShape="1">
-            <a:blip r:embed="rId10" cstate="print">
+            <a:blip cstate="print">
               <a:alphaModFix amt="40000"/>
               <a:extLst>
                 <a:ext uri="{28A0092B-C50C-407E-A947-70E740481C1C}">
                   <a14:useLocalDpi xmlns:a14="http://schemas.microsoft.com/office/drawing/2010/main"/>
                 </a:ext>
                 <a:ext uri="{96DAC541-7B7A-43D3-8B79-37D633B846F1}">
-                  <asvg:svgBlip xmlns:asvg="http://schemas.microsoft.com/office/drawing/2016/SVG/main" r:embed="rId11"/>
+                  <asvg:svgBlip xmlns:asvg="http://schemas.microsoft.com/office/drawing/2016/SVG/main" r:embed="rId10"/>
                 </a:ext>
               </a:extLst>
             </a:blip>
@@ -36553,14 +36553,14 @@
             <a:avLst/>
           </a:prstGeom>
           <a:blipFill dpi="0" rotWithShape="1">
-            <a:blip r:embed="rId6" cstate="print">
+            <a:blip cstate="print">
               <a:alphaModFix amt="40000"/>
               <a:extLst>
                 <a:ext uri="{28A0092B-C50C-407E-A947-70E740481C1C}">
                   <a14:useLocalDpi xmlns:a14="http://schemas.microsoft.com/office/drawing/2010/main"/>
                 </a:ext>
                 <a:ext uri="{96DAC541-7B7A-43D3-8B79-37D633B846F1}">
-                  <asvg:svgBlip xmlns:asvg="http://schemas.microsoft.com/office/drawing/2016/SVG/main" r:embed="rId7"/>
+                  <asvg:svgBlip xmlns:asvg="http://schemas.microsoft.com/office/drawing/2016/SVG/main" r:embed="rId6"/>
                 </a:ext>
               </a:extLst>
             </a:blip>
@@ -36648,14 +36648,14 @@
             <a:avLst/>
           </a:prstGeom>
           <a:blipFill dpi="0" rotWithShape="1">
-            <a:blip r:embed="rId6" cstate="print">
+            <a:blip cstate="print">
               <a:alphaModFix amt="40000"/>
               <a:extLst>
                 <a:ext uri="{28A0092B-C50C-407E-A947-70E740481C1C}">
                   <a14:useLocalDpi xmlns:a14="http://schemas.microsoft.com/office/drawing/2010/main"/>
                 </a:ext>
                 <a:ext uri="{96DAC541-7B7A-43D3-8B79-37D633B846F1}">
-                  <asvg:svgBlip xmlns:asvg="http://schemas.microsoft.com/office/drawing/2016/SVG/main" r:embed="rId7"/>
+                  <asvg:svgBlip xmlns:asvg="http://schemas.microsoft.com/office/drawing/2016/SVG/main" r:embed="rId6"/>
                 </a:ext>
               </a:extLst>
             </a:blip>
@@ -37744,14 +37744,14 @@
             <a:avLst/>
           </a:prstGeom>
           <a:blipFill dpi="0" rotWithShape="1">
-            <a:blip r:embed="rId8" cstate="print">
+            <a:blip cstate="print">
               <a:alphaModFix amt="40000"/>
               <a:extLst>
                 <a:ext uri="{28A0092B-C50C-407E-A947-70E740481C1C}">
                   <a14:useLocalDpi xmlns:a14="http://schemas.microsoft.com/office/drawing/2010/main"/>
                 </a:ext>
                 <a:ext uri="{96DAC541-7B7A-43D3-8B79-37D633B846F1}">
-                  <asvg:svgBlip xmlns:asvg="http://schemas.microsoft.com/office/drawing/2016/SVG/main" r:embed="rId9"/>
+                  <asvg:svgBlip xmlns:asvg="http://schemas.microsoft.com/office/drawing/2016/SVG/main" r:embed="rId8"/>
                 </a:ext>
               </a:extLst>
             </a:blip>
@@ -37839,14 +37839,14 @@
             <a:avLst/>
           </a:prstGeom>
           <a:blipFill dpi="0" rotWithShape="1">
-            <a:blip r:embed="rId8" cstate="print">
+            <a:blip cstate="print">
               <a:alphaModFix amt="40000"/>
               <a:extLst>
                 <a:ext uri="{28A0092B-C50C-407E-A947-70E740481C1C}">
                   <a14:useLocalDpi xmlns:a14="http://schemas.microsoft.com/office/drawing/2010/main"/>
                 </a:ext>
                 <a:ext uri="{96DAC541-7B7A-43D3-8B79-37D633B846F1}">
-                  <asvg:svgBlip xmlns:asvg="http://schemas.microsoft.com/office/drawing/2016/SVG/main" r:embed="rId9"/>
+                  <asvg:svgBlip xmlns:asvg="http://schemas.microsoft.com/office/drawing/2016/SVG/main" r:embed="rId8"/>
                 </a:ext>
               </a:extLst>
             </a:blip>
@@ -39420,14 +39420,14 @@
             <a:avLst/>
           </a:prstGeom>
           <a:blipFill dpi="0" rotWithShape="1">
-            <a:blip r:embed="rId7" cstate="print">
+            <a:blip cstate="print">
               <a:alphaModFix amt="40000"/>
               <a:extLst>
                 <a:ext uri="{28A0092B-C50C-407E-A947-70E740481C1C}">
                   <a14:useLocalDpi xmlns:a14="http://schemas.microsoft.com/office/drawing/2010/main"/>
                 </a:ext>
                 <a:ext uri="{96DAC541-7B7A-43D3-8B79-37D633B846F1}">
-                  <asvg:svgBlip xmlns:asvg="http://schemas.microsoft.com/office/drawing/2016/SVG/main" r:embed="rId8"/>
+                  <asvg:svgBlip xmlns:asvg="http://schemas.microsoft.com/office/drawing/2016/SVG/main" r:embed="rId7"/>
                 </a:ext>
               </a:extLst>
             </a:blip>
@@ -39515,14 +39515,14 @@
             <a:avLst/>
           </a:prstGeom>
           <a:blipFill dpi="0" rotWithShape="1">
-            <a:blip r:embed="rId7" cstate="print">
+            <a:blip cstate="print">
               <a:alphaModFix amt="40000"/>
               <a:extLst>
                 <a:ext uri="{28A0092B-C50C-407E-A947-70E740481C1C}">
                   <a14:useLocalDpi xmlns:a14="http://schemas.microsoft.com/office/drawing/2010/main"/>
                 </a:ext>
                 <a:ext uri="{96DAC541-7B7A-43D3-8B79-37D633B846F1}">
-                  <asvg:svgBlip xmlns:asvg="http://schemas.microsoft.com/office/drawing/2016/SVG/main" r:embed="rId8"/>
+                  <asvg:svgBlip xmlns:asvg="http://schemas.microsoft.com/office/drawing/2016/SVG/main" r:embed="rId7"/>
                 </a:ext>
               </a:extLst>
             </a:blip>
